--- a/assets/template_utp_padres.pptx
+++ b/assets/template_utp_padres.pptx
@@ -284,6 +284,113 @@
     </p:ext>
   </p:extLst>
 </p:presentation>
+</file>
+
+<file path=ppt/revisionInfo.xml><?xml version="1.0" encoding="utf-8"?>
+<p1510:revInfo xmlns:a="http://schemas.openxmlformats.org/drawingml/2006/main" xmlns:r="http://schemas.openxmlformats.org/officeDocument/2006/relationships" xmlns:p1510="http://schemas.microsoft.com/office/powerpoint/2015/10/main">
+  <p1510:revLst>
+    <p1510:client id="{1018A86B-94A9-4CC7-A11C-2E1EEF1DFD4E}" v="2" dt="2026-04-29T19:02:51.026"/>
+  </p1510:revLst>
+</p1510:revInfo>
+</file>
+
+<file path=ppt/changesInfos/changesInfo1.xml><?xml version="1.0" encoding="utf-8"?>
+<pc:chgInfo xmlns:a="http://schemas.openxmlformats.org/drawingml/2006/main" xmlns:r="http://schemas.openxmlformats.org/officeDocument/2006/relationships" xmlns:ac="http://schemas.microsoft.com/office/drawing/2013/main/command" xmlns:pc="http://schemas.microsoft.com/office/powerpoint/2013/main/command">
+  <pc:docChgLst>
+    <pc:chgData name="juani vila bach" userId="140d79d91c36b714" providerId="LiveId" clId="{681BBBA0-CB6B-4408-8383-25A2ECA50787}"/>
+    <pc:docChg chg="undo custSel modSld">
+      <pc:chgData name="juani vila bach" userId="140d79d91c36b714" providerId="LiveId" clId="{681BBBA0-CB6B-4408-8383-25A2ECA50787}" dt="2026-04-29T19:03:38.231" v="19" actId="1076"/>
+      <pc:docMkLst>
+        <pc:docMk/>
+      </pc:docMkLst>
+      <pc:sldChg chg="modSp">
+        <pc:chgData name="juani vila bach" userId="140d79d91c36b714" providerId="LiveId" clId="{681BBBA0-CB6B-4408-8383-25A2ECA50787}" dt="2026-04-29T19:02:50.123" v="17"/>
+        <pc:sldMkLst>
+          <pc:docMk/>
+          <pc:sldMk cId="0" sldId="258"/>
+        </pc:sldMkLst>
+        <pc:spChg chg="mod">
+          <ac:chgData name="juani vila bach" userId="140d79d91c36b714" providerId="LiveId" clId="{681BBBA0-CB6B-4408-8383-25A2ECA50787}" dt="2026-04-29T19:02:50.123" v="17"/>
+          <ac:spMkLst>
+            <pc:docMk/>
+            <pc:sldMk cId="0" sldId="258"/>
+            <ac:spMk id="66" creationId="{00000000-0000-0000-0000-000000000000}"/>
+          </ac:spMkLst>
+        </pc:spChg>
+      </pc:sldChg>
+      <pc:sldChg chg="modSp mod">
+        <pc:chgData name="juani vila bach" userId="140d79d91c36b714" providerId="LiveId" clId="{681BBBA0-CB6B-4408-8383-25A2ECA50787}" dt="2026-04-29T19:02:10.458" v="16" actId="1076"/>
+        <pc:sldMkLst>
+          <pc:docMk/>
+          <pc:sldMk cId="0" sldId="259"/>
+        </pc:sldMkLst>
+        <pc:spChg chg="mod">
+          <ac:chgData name="juani vila bach" userId="140d79d91c36b714" providerId="LiveId" clId="{681BBBA0-CB6B-4408-8383-25A2ECA50787}" dt="2026-04-29T19:02:10.458" v="16" actId="1076"/>
+          <ac:spMkLst>
+            <pc:docMk/>
+            <pc:sldMk cId="0" sldId="259"/>
+            <ac:spMk id="71" creationId="{00000000-0000-0000-0000-000000000000}"/>
+          </ac:spMkLst>
+        </pc:spChg>
+        <pc:spChg chg="mod">
+          <ac:chgData name="juani vila bach" userId="140d79d91c36b714" providerId="LiveId" clId="{681BBBA0-CB6B-4408-8383-25A2ECA50787}" dt="2026-04-29T19:01:39.979" v="13" actId="20577"/>
+          <ac:spMkLst>
+            <pc:docMk/>
+            <pc:sldMk cId="0" sldId="259"/>
+            <ac:spMk id="72" creationId="{00000000-0000-0000-0000-000000000000}"/>
+          </ac:spMkLst>
+        </pc:spChg>
+        <pc:spChg chg="mod">
+          <ac:chgData name="juani vila bach" userId="140d79d91c36b714" providerId="LiveId" clId="{681BBBA0-CB6B-4408-8383-25A2ECA50787}" dt="2026-04-29T19:02:03.386" v="15" actId="1076"/>
+          <ac:spMkLst>
+            <pc:docMk/>
+            <pc:sldMk cId="0" sldId="259"/>
+            <ac:spMk id="73" creationId="{00000000-0000-0000-0000-000000000000}"/>
+          </ac:spMkLst>
+        </pc:spChg>
+        <pc:spChg chg="mod">
+          <ac:chgData name="juani vila bach" userId="140d79d91c36b714" providerId="LiveId" clId="{681BBBA0-CB6B-4408-8383-25A2ECA50787}" dt="2026-04-29T19:01:56.095" v="14" actId="1076"/>
+          <ac:spMkLst>
+            <pc:docMk/>
+            <pc:sldMk cId="0" sldId="259"/>
+            <ac:spMk id="74" creationId="{00000000-0000-0000-0000-000000000000}"/>
+          </ac:spMkLst>
+        </pc:spChg>
+        <pc:spChg chg="mod">
+          <ac:chgData name="juani vila bach" userId="140d79d91c36b714" providerId="LiveId" clId="{681BBBA0-CB6B-4408-8383-25A2ECA50787}" dt="2026-04-29T19:01:12.064" v="1" actId="1076"/>
+          <ac:spMkLst>
+            <pc:docMk/>
+            <pc:sldMk cId="0" sldId="259"/>
+            <ac:spMk id="75" creationId="{00000000-0000-0000-0000-000000000000}"/>
+          </ac:spMkLst>
+        </pc:spChg>
+        <pc:spChg chg="mod">
+          <ac:chgData name="juani vila bach" userId="140d79d91c36b714" providerId="LiveId" clId="{681BBBA0-CB6B-4408-8383-25A2ECA50787}" dt="2026-04-29T19:01:34.329" v="5" actId="1076"/>
+          <ac:spMkLst>
+            <pc:docMk/>
+            <pc:sldMk cId="0" sldId="259"/>
+            <ac:spMk id="76" creationId="{00000000-0000-0000-0000-000000000000}"/>
+          </ac:spMkLst>
+        </pc:spChg>
+      </pc:sldChg>
+      <pc:sldChg chg="modSp mod">
+        <pc:chgData name="juani vila bach" userId="140d79d91c36b714" providerId="LiveId" clId="{681BBBA0-CB6B-4408-8383-25A2ECA50787}" dt="2026-04-29T19:03:38.231" v="19" actId="1076"/>
+        <pc:sldMkLst>
+          <pc:docMk/>
+          <pc:sldMk cId="0" sldId="261"/>
+        </pc:sldMkLst>
+        <pc:spChg chg="mod">
+          <ac:chgData name="juani vila bach" userId="140d79d91c36b714" providerId="LiveId" clId="{681BBBA0-CB6B-4408-8383-25A2ECA50787}" dt="2026-04-29T19:03:38.231" v="19" actId="1076"/>
+          <ac:spMkLst>
+            <pc:docMk/>
+            <pc:sldMk cId="0" sldId="261"/>
+            <ac:spMk id="87" creationId="{00000000-0000-0000-0000-000000000000}"/>
+          </ac:spMkLst>
+        </pc:spChg>
+      </pc:sldChg>
+    </pc:docChg>
+  </pc:docChgLst>
+</pc:chgInfo>
 </file>
 
 <file path=ppt/notesMasters/notesMaster1.xml><?xml version="1.0" encoding="utf-8"?>
@@ -6938,7 +7045,7 @@
         </p:nvSpPr>
         <p:spPr>
           <a:xfrm>
-            <a:off x="1450475" y="9423975"/>
+            <a:off x="1450475" y="9505349"/>
             <a:ext cx="7357200" cy="1597200"/>
           </a:xfrm>
           <a:prstGeom prst="rect">
@@ -7131,7 +7238,7 @@
         </p:nvSpPr>
         <p:spPr>
           <a:xfrm>
-            <a:off x="1464900" y="11819650"/>
+            <a:off x="1450475" y="12245287"/>
             <a:ext cx="7357200" cy="1597200"/>
           </a:xfrm>
           <a:prstGeom prst="rect">
@@ -7238,7 +7345,7 @@
         </p:nvSpPr>
         <p:spPr>
           <a:xfrm>
-            <a:off x="1464900" y="11242399"/>
+            <a:off x="1464900" y="11586662"/>
             <a:ext cx="7357200" cy="485700"/>
           </a:xfrm>
           <a:prstGeom prst="rect">
@@ -7324,7 +7431,7 @@
         </p:nvSpPr>
         <p:spPr>
           <a:xfrm>
-            <a:off x="1450475" y="14287500"/>
+            <a:off x="1450475" y="15287823"/>
             <a:ext cx="7357200" cy="1597200"/>
           </a:xfrm>
           <a:prstGeom prst="rect">
@@ -7364,7 +7471,7 @@
                 <a:cs typeface="Public Sans Light"/>
                 <a:sym typeface="Public Sans Light"/>
               </a:rPr>
-              <a:t>&lt;&lt;gardner_padres_03_desc&gt;</a:t>
+              <a:t>&lt;&lt;gardner_padres_03_desc&gt;&gt;</a:t>
             </a:r>
             <a:endParaRPr sz="2000" dirty="0">
               <a:solidFill>
@@ -7431,7 +7538,7 @@
         </p:nvSpPr>
         <p:spPr>
           <a:xfrm>
-            <a:off x="1450475" y="13710249"/>
+            <a:off x="1450475" y="14629198"/>
             <a:ext cx="7357200" cy="485700"/>
           </a:xfrm>
           <a:prstGeom prst="rect">
@@ -7858,7 +7965,7 @@
         </p:nvSpPr>
         <p:spPr>
           <a:xfrm>
-            <a:off x="743331" y="6056650"/>
+            <a:off x="743325" y="7021578"/>
             <a:ext cx="8743200" cy="1597200"/>
           </a:xfrm>
           <a:prstGeom prst="rect">

--- a/assets/template_utp_padres.pptx
+++ b/assets/template_utp_padres.pptx
@@ -289,7 +289,7 @@
 <file path=ppt/revisionInfo.xml><?xml version="1.0" encoding="utf-8"?>
 <p1510:revInfo xmlns:a="http://schemas.openxmlformats.org/drawingml/2006/main" xmlns:r="http://schemas.openxmlformats.org/officeDocument/2006/relationships" xmlns:p1510="http://schemas.microsoft.com/office/powerpoint/2015/10/main">
   <p1510:revLst>
-    <p1510:client id="{1018A86B-94A9-4CC7-A11C-2E1EEF1DFD4E}" v="2" dt="2026-04-29T19:02:51.026"/>
+    <p1510:client id="{1018A86B-94A9-4CC7-A11C-2E1EEF1DFD4E}" v="6" dt="2026-04-29T20:48:12.318"/>
   </p1510:revLst>
 </p1510:revInfo>
 </file>
@@ -299,16 +299,32 @@
   <pc:docChgLst>
     <pc:chgData name="juani vila bach" userId="140d79d91c36b714" providerId="LiveId" clId="{681BBBA0-CB6B-4408-8383-25A2ECA50787}"/>
     <pc:docChg chg="undo custSel modSld">
-      <pc:chgData name="juani vila bach" userId="140d79d91c36b714" providerId="LiveId" clId="{681BBBA0-CB6B-4408-8383-25A2ECA50787}" dt="2026-04-29T19:03:38.231" v="19" actId="1076"/>
+      <pc:chgData name="juani vila bach" userId="140d79d91c36b714" providerId="LiveId" clId="{681BBBA0-CB6B-4408-8383-25A2ECA50787}" dt="2026-04-29T20:48:34.800" v="76" actId="1076"/>
       <pc:docMkLst>
         <pc:docMk/>
       </pc:docMkLst>
-      <pc:sldChg chg="modSp">
-        <pc:chgData name="juani vila bach" userId="140d79d91c36b714" providerId="LiveId" clId="{681BBBA0-CB6B-4408-8383-25A2ECA50787}" dt="2026-04-29T19:02:50.123" v="17"/>
+      <pc:sldChg chg="modSp mod">
+        <pc:chgData name="juani vila bach" userId="140d79d91c36b714" providerId="LiveId" clId="{681BBBA0-CB6B-4408-8383-25A2ECA50787}" dt="2026-04-29T20:47:04.565" v="20" actId="2711"/>
         <pc:sldMkLst>
           <pc:docMk/>
           <pc:sldMk cId="0" sldId="258"/>
         </pc:sldMkLst>
+        <pc:spChg chg="mod">
+          <ac:chgData name="juani vila bach" userId="140d79d91c36b714" providerId="LiveId" clId="{681BBBA0-CB6B-4408-8383-25A2ECA50787}" dt="2026-04-29T20:47:04.565" v="20" actId="2711"/>
+          <ac:spMkLst>
+            <pc:docMk/>
+            <pc:sldMk cId="0" sldId="258"/>
+            <ac:spMk id="64" creationId="{00000000-0000-0000-0000-000000000000}"/>
+          </ac:spMkLst>
+        </pc:spChg>
+        <pc:spChg chg="mod">
+          <ac:chgData name="juani vila bach" userId="140d79d91c36b714" providerId="LiveId" clId="{681BBBA0-CB6B-4408-8383-25A2ECA50787}" dt="2026-04-29T20:47:04.565" v="20" actId="2711"/>
+          <ac:spMkLst>
+            <pc:docMk/>
+            <pc:sldMk cId="0" sldId="258"/>
+            <ac:spMk id="65" creationId="{00000000-0000-0000-0000-000000000000}"/>
+          </ac:spMkLst>
+        </pc:spChg>
         <pc:spChg chg="mod">
           <ac:chgData name="juani vila bach" userId="140d79d91c36b714" providerId="LiveId" clId="{681BBBA0-CB6B-4408-8383-25A2ECA50787}" dt="2026-04-29T19:02:50.123" v="17"/>
           <ac:spMkLst>
@@ -318,58 +334,177 @@
           </ac:spMkLst>
         </pc:spChg>
       </pc:sldChg>
-      <pc:sldChg chg="modSp mod">
-        <pc:chgData name="juani vila bach" userId="140d79d91c36b714" providerId="LiveId" clId="{681BBBA0-CB6B-4408-8383-25A2ECA50787}" dt="2026-04-29T19:02:10.458" v="16" actId="1076"/>
+      <pc:sldChg chg="addSp delSp modSp mod">
+        <pc:chgData name="juani vila bach" userId="140d79d91c36b714" providerId="LiveId" clId="{681BBBA0-CB6B-4408-8383-25A2ECA50787}" dt="2026-04-29T20:47:56.206" v="68" actId="20577"/>
         <pc:sldMkLst>
           <pc:docMk/>
           <pc:sldMk cId="0" sldId="259"/>
         </pc:sldMkLst>
-        <pc:spChg chg="mod">
-          <ac:chgData name="juani vila bach" userId="140d79d91c36b714" providerId="LiveId" clId="{681BBBA0-CB6B-4408-8383-25A2ECA50787}" dt="2026-04-29T19:02:10.458" v="16" actId="1076"/>
+        <pc:spChg chg="add mod">
+          <ac:chgData name="juani vila bach" userId="140d79d91c36b714" providerId="LiveId" clId="{681BBBA0-CB6B-4408-8383-25A2ECA50787}" dt="2026-04-29T20:47:36.645" v="41" actId="20577"/>
+          <ac:spMkLst>
+            <pc:docMk/>
+            <pc:sldMk cId="0" sldId="259"/>
+            <ac:spMk id="2" creationId="{A7ACE86D-BE89-764F-A30D-31A6764B17B9}"/>
+          </ac:spMkLst>
+        </pc:spChg>
+        <pc:spChg chg="add mod">
+          <ac:chgData name="juani vila bach" userId="140d79d91c36b714" providerId="LiveId" clId="{681BBBA0-CB6B-4408-8383-25A2ECA50787}" dt="2026-04-29T20:47:24.509" v="22"/>
+          <ac:spMkLst>
+            <pc:docMk/>
+            <pc:sldMk cId="0" sldId="259"/>
+            <ac:spMk id="3" creationId="{91D17890-EDB0-36E1-087F-1BE8401EE429}"/>
+          </ac:spMkLst>
+        </pc:spChg>
+        <pc:spChg chg="add mod">
+          <ac:chgData name="juani vila bach" userId="140d79d91c36b714" providerId="LiveId" clId="{681BBBA0-CB6B-4408-8383-25A2ECA50787}" dt="2026-04-29T20:47:36.442" v="40" actId="20577"/>
+          <ac:spMkLst>
+            <pc:docMk/>
+            <pc:sldMk cId="0" sldId="259"/>
+            <ac:spMk id="4" creationId="{5181C0F9-BE78-5B10-7C10-80F27D956745}"/>
+          </ac:spMkLst>
+        </pc:spChg>
+        <pc:spChg chg="add mod">
+          <ac:chgData name="juani vila bach" userId="140d79d91c36b714" providerId="LiveId" clId="{681BBBA0-CB6B-4408-8383-25A2ECA50787}" dt="2026-04-29T20:47:24.509" v="22"/>
+          <ac:spMkLst>
+            <pc:docMk/>
+            <pc:sldMk cId="0" sldId="259"/>
+            <ac:spMk id="5" creationId="{74D32D8D-59DE-27BF-B954-77F45D82AE58}"/>
+          </ac:spMkLst>
+        </pc:spChg>
+        <pc:spChg chg="add mod">
+          <ac:chgData name="juani vila bach" userId="140d79d91c36b714" providerId="LiveId" clId="{681BBBA0-CB6B-4408-8383-25A2ECA50787}" dt="2026-04-29T20:47:36.182" v="39" actId="20577"/>
+          <ac:spMkLst>
+            <pc:docMk/>
+            <pc:sldMk cId="0" sldId="259"/>
+            <ac:spMk id="6" creationId="{259FF831-0D4C-B0D3-7440-0B2F8FFEA3F6}"/>
+          </ac:spMkLst>
+        </pc:spChg>
+        <pc:spChg chg="add mod">
+          <ac:chgData name="juani vila bach" userId="140d79d91c36b714" providerId="LiveId" clId="{681BBBA0-CB6B-4408-8383-25A2ECA50787}" dt="2026-04-29T20:47:24.509" v="22"/>
+          <ac:spMkLst>
+            <pc:docMk/>
+            <pc:sldMk cId="0" sldId="259"/>
+            <ac:spMk id="7" creationId="{329AF43C-B5AE-FA45-270C-D97764193DE3}"/>
+          </ac:spMkLst>
+        </pc:spChg>
+        <pc:spChg chg="add mod">
+          <ac:chgData name="juani vila bach" userId="140d79d91c36b714" providerId="LiveId" clId="{681BBBA0-CB6B-4408-8383-25A2ECA50787}" dt="2026-04-29T20:47:52.111" v="61" actId="20577"/>
+          <ac:spMkLst>
+            <pc:docMk/>
+            <pc:sldMk cId="0" sldId="259"/>
+            <ac:spMk id="8" creationId="{115AF92C-25E9-04EA-B674-EF27B6196475}"/>
+          </ac:spMkLst>
+        </pc:spChg>
+        <pc:spChg chg="add mod">
+          <ac:chgData name="juani vila bach" userId="140d79d91c36b714" providerId="LiveId" clId="{681BBBA0-CB6B-4408-8383-25A2ECA50787}" dt="2026-04-29T20:47:44.297" v="47"/>
+          <ac:spMkLst>
+            <pc:docMk/>
+            <pc:sldMk cId="0" sldId="259"/>
+            <ac:spMk id="9" creationId="{59495B10-42B3-1AB3-1F0D-ACB11F00205A}"/>
+          </ac:spMkLst>
+        </pc:spChg>
+        <pc:spChg chg="add mod">
+          <ac:chgData name="juani vila bach" userId="140d79d91c36b714" providerId="LiveId" clId="{681BBBA0-CB6B-4408-8383-25A2ECA50787}" dt="2026-04-29T20:47:48.198" v="54" actId="20577"/>
+          <ac:spMkLst>
+            <pc:docMk/>
+            <pc:sldMk cId="0" sldId="259"/>
+            <ac:spMk id="10" creationId="{371541A8-DFC1-2231-E365-51DD71558D4C}"/>
+          </ac:spMkLst>
+        </pc:spChg>
+        <pc:spChg chg="add mod">
+          <ac:chgData name="juani vila bach" userId="140d79d91c36b714" providerId="LiveId" clId="{681BBBA0-CB6B-4408-8383-25A2ECA50787}" dt="2026-04-29T20:47:44.297" v="47"/>
+          <ac:spMkLst>
+            <pc:docMk/>
+            <pc:sldMk cId="0" sldId="259"/>
+            <ac:spMk id="11" creationId="{0DAC3AC7-F012-2F7D-7D06-5C39F05B88AC}"/>
+          </ac:spMkLst>
+        </pc:spChg>
+        <pc:spChg chg="add mod">
+          <ac:chgData name="juani vila bach" userId="140d79d91c36b714" providerId="LiveId" clId="{681BBBA0-CB6B-4408-8383-25A2ECA50787}" dt="2026-04-29T20:47:56.206" v="68" actId="20577"/>
+          <ac:spMkLst>
+            <pc:docMk/>
+            <pc:sldMk cId="0" sldId="259"/>
+            <ac:spMk id="12" creationId="{DC0BE782-3E80-0C37-DC61-3D842BD3FF96}"/>
+          </ac:spMkLst>
+        </pc:spChg>
+        <pc:spChg chg="add mod">
+          <ac:chgData name="juani vila bach" userId="140d79d91c36b714" providerId="LiveId" clId="{681BBBA0-CB6B-4408-8383-25A2ECA50787}" dt="2026-04-29T20:47:44.297" v="47"/>
+          <ac:spMkLst>
+            <pc:docMk/>
+            <pc:sldMk cId="0" sldId="259"/>
+            <ac:spMk id="13" creationId="{7B669BB3-5AC2-D363-B2DC-30CE1EC4B127}"/>
+          </ac:spMkLst>
+        </pc:spChg>
+        <pc:spChg chg="add del mod">
+          <ac:chgData name="juani vila bach" userId="140d79d91c36b714" providerId="LiveId" clId="{681BBBA0-CB6B-4408-8383-25A2ECA50787}" dt="2026-04-29T20:47:43.533" v="46" actId="478"/>
           <ac:spMkLst>
             <pc:docMk/>
             <pc:sldMk cId="0" sldId="259"/>
             <ac:spMk id="71" creationId="{00000000-0000-0000-0000-000000000000}"/>
           </ac:spMkLst>
         </pc:spChg>
-        <pc:spChg chg="mod">
-          <ac:chgData name="juani vila bach" userId="140d79d91c36b714" providerId="LiveId" clId="{681BBBA0-CB6B-4408-8383-25A2ECA50787}" dt="2026-04-29T19:01:39.979" v="13" actId="20577"/>
+        <pc:spChg chg="add del mod">
+          <ac:chgData name="juani vila bach" userId="140d79d91c36b714" providerId="LiveId" clId="{681BBBA0-CB6B-4408-8383-25A2ECA50787}" dt="2026-04-29T20:47:43.533" v="46" actId="478"/>
           <ac:spMkLst>
             <pc:docMk/>
             <pc:sldMk cId="0" sldId="259"/>
             <ac:spMk id="72" creationId="{00000000-0000-0000-0000-000000000000}"/>
           </ac:spMkLst>
         </pc:spChg>
-        <pc:spChg chg="mod">
-          <ac:chgData name="juani vila bach" userId="140d79d91c36b714" providerId="LiveId" clId="{681BBBA0-CB6B-4408-8383-25A2ECA50787}" dt="2026-04-29T19:02:03.386" v="15" actId="1076"/>
+        <pc:spChg chg="add del mod">
+          <ac:chgData name="juani vila bach" userId="140d79d91c36b714" providerId="LiveId" clId="{681BBBA0-CB6B-4408-8383-25A2ECA50787}" dt="2026-04-29T20:47:43.533" v="46" actId="478"/>
           <ac:spMkLst>
             <pc:docMk/>
             <pc:sldMk cId="0" sldId="259"/>
             <ac:spMk id="73" creationId="{00000000-0000-0000-0000-000000000000}"/>
           </ac:spMkLst>
         </pc:spChg>
-        <pc:spChg chg="mod">
-          <ac:chgData name="juani vila bach" userId="140d79d91c36b714" providerId="LiveId" clId="{681BBBA0-CB6B-4408-8383-25A2ECA50787}" dt="2026-04-29T19:01:56.095" v="14" actId="1076"/>
+        <pc:spChg chg="add del mod">
+          <ac:chgData name="juani vila bach" userId="140d79d91c36b714" providerId="LiveId" clId="{681BBBA0-CB6B-4408-8383-25A2ECA50787}" dt="2026-04-29T20:47:43.533" v="46" actId="478"/>
           <ac:spMkLst>
             <pc:docMk/>
             <pc:sldMk cId="0" sldId="259"/>
             <ac:spMk id="74" creationId="{00000000-0000-0000-0000-000000000000}"/>
           </ac:spMkLst>
         </pc:spChg>
-        <pc:spChg chg="mod">
-          <ac:chgData name="juani vila bach" userId="140d79d91c36b714" providerId="LiveId" clId="{681BBBA0-CB6B-4408-8383-25A2ECA50787}" dt="2026-04-29T19:01:12.064" v="1" actId="1076"/>
+        <pc:spChg chg="add del mod">
+          <ac:chgData name="juani vila bach" userId="140d79d91c36b714" providerId="LiveId" clId="{681BBBA0-CB6B-4408-8383-25A2ECA50787}" dt="2026-04-29T20:47:43.533" v="46" actId="478"/>
           <ac:spMkLst>
             <pc:docMk/>
             <pc:sldMk cId="0" sldId="259"/>
             <ac:spMk id="75" creationId="{00000000-0000-0000-0000-000000000000}"/>
           </ac:spMkLst>
         </pc:spChg>
-        <pc:spChg chg="mod">
-          <ac:chgData name="juani vila bach" userId="140d79d91c36b714" providerId="LiveId" clId="{681BBBA0-CB6B-4408-8383-25A2ECA50787}" dt="2026-04-29T19:01:34.329" v="5" actId="1076"/>
+        <pc:spChg chg="add del mod">
+          <ac:chgData name="juani vila bach" userId="140d79d91c36b714" providerId="LiveId" clId="{681BBBA0-CB6B-4408-8383-25A2ECA50787}" dt="2026-04-29T20:47:43.533" v="46" actId="478"/>
           <ac:spMkLst>
             <pc:docMk/>
             <pc:sldMk cId="0" sldId="259"/>
             <ac:spMk id="76" creationId="{00000000-0000-0000-0000-000000000000}"/>
+          </ac:spMkLst>
+        </pc:spChg>
+      </pc:sldChg>
+      <pc:sldChg chg="addSp delSp modSp mod">
+        <pc:chgData name="juani vila bach" userId="140d79d91c36b714" providerId="LiveId" clId="{681BBBA0-CB6B-4408-8383-25A2ECA50787}" dt="2026-04-29T20:48:34.800" v="76" actId="1076"/>
+        <pc:sldMkLst>
+          <pc:docMk/>
+          <pc:sldMk cId="0" sldId="260"/>
+        </pc:sldMkLst>
+        <pc:spChg chg="add mod">
+          <ac:chgData name="juani vila bach" userId="140d79d91c36b714" providerId="LiveId" clId="{681BBBA0-CB6B-4408-8383-25A2ECA50787}" dt="2026-04-29T20:48:34.800" v="76" actId="1076"/>
+          <ac:spMkLst>
+            <pc:docMk/>
+            <pc:sldMk cId="0" sldId="260"/>
+            <ac:spMk id="2" creationId="{3808622E-C38C-C1E0-FD64-91A2DD39376D}"/>
+          </ac:spMkLst>
+        </pc:spChg>
+        <pc:spChg chg="del">
+          <ac:chgData name="juani vila bach" userId="140d79d91c36b714" providerId="LiveId" clId="{681BBBA0-CB6B-4408-8383-25A2ECA50787}" dt="2026-04-29T20:48:11.862" v="69" actId="478"/>
+          <ac:spMkLst>
+            <pc:docMk/>
+            <pc:sldMk cId="0" sldId="260"/>
+            <ac:spMk id="81" creationId="{00000000-0000-0000-0000-000000000000}"/>
           </ac:spMkLst>
         </pc:spChg>
       </pc:sldChg>
@@ -6856,7 +6991,7 @@
                 <a:solidFill>
                   <a:schemeClr val="lt1"/>
                 </a:solidFill>
-                <a:latin typeface="TT Squares Black" panose="02000505040000020003" pitchFamily="50" charset="0"/>
+                <a:latin typeface="Formular" panose="02000000000000000000" pitchFamily="2" charset="0"/>
                 <a:ea typeface="Public Sans"/>
                 <a:cs typeface="Public Sans"/>
                 <a:sym typeface="Public Sans"/>
@@ -6867,7 +7002,7 @@
               <a:solidFill>
                 <a:schemeClr val="lt1"/>
               </a:solidFill>
-              <a:latin typeface="TT Squares Black" panose="02000505040000020003" pitchFamily="50" charset="0"/>
+              <a:latin typeface="Formular" panose="02000000000000000000" pitchFamily="2" charset="0"/>
               <a:ea typeface="Public Sans"/>
               <a:cs typeface="Public Sans"/>
               <a:sym typeface="Public Sans"/>
@@ -6919,7 +7054,7 @@
                 <a:solidFill>
                   <a:schemeClr val="lt1"/>
                 </a:solidFill>
-                <a:latin typeface="TT Squares Black" panose="02000505040000020003" pitchFamily="50" charset="0"/>
+                <a:latin typeface="Formular" panose="02000000000000000000" pitchFamily="2" charset="0"/>
                 <a:ea typeface="Public Sans"/>
                 <a:cs typeface="Public Sans"/>
                 <a:sym typeface="Public Sans"/>
@@ -6930,7 +7065,7 @@
               <a:solidFill>
                 <a:schemeClr val="lt1"/>
               </a:solidFill>
-              <a:latin typeface="TT Squares Black" panose="02000505040000020003" pitchFamily="50" charset="0"/>
+              <a:latin typeface="Formular" panose="02000000000000000000" pitchFamily="2" charset="0"/>
               <a:ea typeface="Public Sans"/>
               <a:cs typeface="Public Sans"/>
               <a:sym typeface="Public Sans"/>
@@ -6950,7 +7085,7 @@
               <a:solidFill>
                 <a:schemeClr val="lt1"/>
               </a:solidFill>
-              <a:latin typeface="TT Squares Black" panose="02000505040000020003" pitchFamily="50" charset="0"/>
+              <a:latin typeface="Formular" panose="02000000000000000000" pitchFamily="2" charset="0"/>
               <a:ea typeface="Public Sans"/>
               <a:cs typeface="Public Sans"/>
               <a:sym typeface="Public Sans"/>
@@ -7039,13 +7174,19 @@
       </p:grpSpPr>
       <p:sp>
         <p:nvSpPr>
-          <p:cNvPr id="71" name="Google Shape;71;p16"/>
+          <p:cNvPr id="8" name="Google Shape;71;p16">
+            <a:extLst>
+              <a:ext uri="{FF2B5EF4-FFF2-40B4-BE49-F238E27FC236}">
+                <a16:creationId xmlns:a16="http://schemas.microsoft.com/office/drawing/2014/main" id="{115AF92C-25E9-04EA-B674-EF27B6196475}"/>
+              </a:ext>
+            </a:extLst>
+          </p:cNvPr>
           <p:cNvSpPr txBox="1"/>
           <p:nvPr/>
         </p:nvSpPr>
         <p:spPr>
           <a:xfrm>
-            <a:off x="1450475" y="9505349"/>
+            <a:off x="1450475" y="9424667"/>
             <a:ext cx="7357200" cy="1597200"/>
           </a:xfrm>
           <a:prstGeom prst="rect">
@@ -7146,7 +7287,13 @@
       </p:sp>
       <p:sp>
         <p:nvSpPr>
-          <p:cNvPr id="72" name="Google Shape;72;p16"/>
+          <p:cNvPr id="9" name="Google Shape;72;p16">
+            <a:extLst>
+              <a:ext uri="{FF2B5EF4-FFF2-40B4-BE49-F238E27FC236}">
+                <a16:creationId xmlns:a16="http://schemas.microsoft.com/office/drawing/2014/main" id="{59495B10-42B3-1AB3-1F0D-ACB11F00205A}"/>
+              </a:ext>
+            </a:extLst>
+          </p:cNvPr>
           <p:cNvSpPr txBox="1"/>
           <p:nvPr/>
         </p:nvSpPr>
@@ -7232,13 +7379,19 @@
       </p:sp>
       <p:sp>
         <p:nvSpPr>
-          <p:cNvPr id="73" name="Google Shape;73;p16"/>
+          <p:cNvPr id="10" name="Google Shape;73;p16">
+            <a:extLst>
+              <a:ext uri="{FF2B5EF4-FFF2-40B4-BE49-F238E27FC236}">
+                <a16:creationId xmlns:a16="http://schemas.microsoft.com/office/drawing/2014/main" id="{371541A8-DFC1-2231-E365-51DD71558D4C}"/>
+              </a:ext>
+            </a:extLst>
+          </p:cNvPr>
           <p:cNvSpPr txBox="1"/>
           <p:nvPr/>
         </p:nvSpPr>
         <p:spPr>
           <a:xfrm>
-            <a:off x="1450475" y="12245287"/>
+            <a:off x="1450475" y="12164605"/>
             <a:ext cx="7357200" cy="1597200"/>
           </a:xfrm>
           <a:prstGeom prst="rect">
@@ -7339,7 +7492,13 @@
       </p:sp>
       <p:sp>
         <p:nvSpPr>
-          <p:cNvPr id="74" name="Google Shape;74;p16"/>
+          <p:cNvPr id="11" name="Google Shape;74;p16">
+            <a:extLst>
+              <a:ext uri="{FF2B5EF4-FFF2-40B4-BE49-F238E27FC236}">
+                <a16:creationId xmlns:a16="http://schemas.microsoft.com/office/drawing/2014/main" id="{0DAC3AC7-F012-2F7D-7D06-5C39F05B88AC}"/>
+              </a:ext>
+            </a:extLst>
+          </p:cNvPr>
           <p:cNvSpPr txBox="1"/>
           <p:nvPr/>
         </p:nvSpPr>
@@ -7425,13 +7584,19 @@
       </p:sp>
       <p:sp>
         <p:nvSpPr>
-          <p:cNvPr id="75" name="Google Shape;75;p16"/>
+          <p:cNvPr id="12" name="Google Shape;75;p16">
+            <a:extLst>
+              <a:ext uri="{FF2B5EF4-FFF2-40B4-BE49-F238E27FC236}">
+                <a16:creationId xmlns:a16="http://schemas.microsoft.com/office/drawing/2014/main" id="{DC0BE782-3E80-0C37-DC61-3D842BD3FF96}"/>
+              </a:ext>
+            </a:extLst>
+          </p:cNvPr>
           <p:cNvSpPr txBox="1"/>
           <p:nvPr/>
         </p:nvSpPr>
         <p:spPr>
           <a:xfrm>
-            <a:off x="1450475" y="15287823"/>
+            <a:off x="1450475" y="15207141"/>
             <a:ext cx="7357200" cy="1597200"/>
           </a:xfrm>
           <a:prstGeom prst="rect">
@@ -7532,7 +7697,13 @@
       </p:sp>
       <p:sp>
         <p:nvSpPr>
-          <p:cNvPr id="76" name="Google Shape;76;p16"/>
+          <p:cNvPr id="13" name="Google Shape;76;p16">
+            <a:extLst>
+              <a:ext uri="{FF2B5EF4-FFF2-40B4-BE49-F238E27FC236}">
+                <a16:creationId xmlns:a16="http://schemas.microsoft.com/office/drawing/2014/main" id="{7B669BB3-5AC2-D363-B2DC-30CE1EC4B127}"/>
+              </a:ext>
+            </a:extLst>
+          </p:cNvPr>
           <p:cNvSpPr txBox="1"/>
           <p:nvPr/>
         </p:nvSpPr>
@@ -7656,14 +7827,20 @@
       </p:grpSpPr>
       <p:sp>
         <p:nvSpPr>
-          <p:cNvPr id="81" name="Google Shape;81;p17"/>
+          <p:cNvPr id="2" name="Google Shape;81;p17">
+            <a:extLst>
+              <a:ext uri="{FF2B5EF4-FFF2-40B4-BE49-F238E27FC236}">
+                <a16:creationId xmlns:a16="http://schemas.microsoft.com/office/drawing/2014/main" id="{3808622E-C38C-C1E0-FD64-91A2DD39376D}"/>
+              </a:ext>
+            </a:extLst>
+          </p:cNvPr>
           <p:cNvSpPr txBox="1"/>
           <p:nvPr/>
         </p:nvSpPr>
         <p:spPr>
           <a:xfrm>
-            <a:off x="1450475" y="10626625"/>
-            <a:ext cx="7184700" cy="5258100"/>
+            <a:off x="1450863" y="10596283"/>
+            <a:ext cx="7385274" cy="6566992"/>
           </a:xfrm>
           <a:prstGeom prst="rect">
             <a:avLst/>
@@ -7679,7 +7856,7 @@
           </a:bodyPr>
           <a:lstStyle/>
           <a:p>
-            <a:pPr marL="0" lvl="0" indent="0" algn="l" rtl="0">
+            <a:pPr marL="0" lvl="0" indent="0" rtl="0">
               <a:lnSpc>
                 <a:spcPct val="150000"/>
               </a:lnSpc>
@@ -7693,7 +7870,7 @@
               <a:buNone/>
             </a:pPr>
             <a:r>
-              <a:rPr lang="es-419" sz="2200" dirty="0">
+              <a:rPr lang="es-419" sz="2400" dirty="0">
                 <a:solidFill>
                   <a:schemeClr val="lt1"/>
                 </a:solidFill>
@@ -7705,7 +7882,7 @@
               <a:t>&lt;&lt;</a:t>
             </a:r>
             <a:r>
-              <a:rPr lang="es-419" sz="2200" dirty="0" err="1">
+              <a:rPr lang="es-419" sz="2400" dirty="0" err="1">
                 <a:solidFill>
                   <a:schemeClr val="lt1"/>
                 </a:solidFill>
@@ -7714,10 +7891,10 @@
                 <a:cs typeface="Public Sans"/>
                 <a:sym typeface="Public Sans"/>
               </a:rPr>
-              <a:t>abstracto_padres_desc</a:t>
+              <a:t>abstracto_desc</a:t>
             </a:r>
             <a:r>
-              <a:rPr lang="es-419" sz="2200" dirty="0">
+              <a:rPr lang="es-419" sz="2400" dirty="0">
                 <a:solidFill>
                   <a:schemeClr val="lt1"/>
                 </a:solidFill>
@@ -7728,18 +7905,9 @@
               </a:rPr>
               <a:t>&gt;&gt;</a:t>
             </a:r>
-            <a:endParaRPr sz="2200" dirty="0">
-              <a:solidFill>
-                <a:schemeClr val="lt1"/>
-              </a:solidFill>
-              <a:latin typeface="Formular" panose="02000000000000000000" pitchFamily="2" charset="0"/>
-              <a:ea typeface="Public Sans"/>
-              <a:cs typeface="Public Sans"/>
-              <a:sym typeface="Public Sans"/>
-            </a:endParaRPr>
-          </a:p>
-          <a:p>
-            <a:pPr marL="0" lvl="0" indent="0" algn="l" rtl="0">
+          </a:p>
+          <a:p>
+            <a:pPr marL="0" lvl="0" indent="0" rtl="0">
               <a:lnSpc>
                 <a:spcPct val="150000"/>
               </a:lnSpc>
@@ -7752,7 +7920,7 @@
               <a:buSzPts val="853"/>
               <a:buNone/>
             </a:pPr>
-            <a:endParaRPr sz="1850" dirty="0">
+            <a:endParaRPr lang="es-419" sz="2400" dirty="0">
               <a:solidFill>
                 <a:schemeClr val="lt1"/>
               </a:solidFill>
@@ -7763,7 +7931,7 @@
             </a:endParaRPr>
           </a:p>
           <a:p>
-            <a:pPr marL="0" lvl="0" indent="0" algn="l" rtl="0">
+            <a:pPr marL="0" lvl="0" indent="0" rtl="0">
               <a:spcBef>
                 <a:spcPts val="0"/>
               </a:spcBef>
@@ -7773,7 +7941,7 @@
               <a:buSzPts val="853"/>
               <a:buNone/>
             </a:pPr>
-            <a:endParaRPr sz="1850" dirty="0">
+            <a:endParaRPr sz="2400" dirty="0">
               <a:solidFill>
                 <a:schemeClr val="lt1"/>
               </a:solidFill>

--- a/assets/template_utp_padres.pptx
+++ b/assets/template_utp_padres.pptx
@@ -289,7 +289,7 @@
 <file path=ppt/revisionInfo.xml><?xml version="1.0" encoding="utf-8"?>
 <p1510:revInfo xmlns:a="http://schemas.openxmlformats.org/drawingml/2006/main" xmlns:r="http://schemas.openxmlformats.org/officeDocument/2006/relationships" xmlns:p1510="http://schemas.microsoft.com/office/powerpoint/2015/10/main">
   <p1510:revLst>
-    <p1510:client id="{1018A86B-94A9-4CC7-A11C-2E1EEF1DFD4E}" v="6" dt="2026-04-29T20:48:12.318"/>
+    <p1510:client id="{1018A86B-94A9-4CC7-A11C-2E1EEF1DFD4E}" v="7" dt="2026-04-30T13:33:30.402"/>
   </p1510:revLst>
 </p1510:revInfo>
 </file>
@@ -299,16 +299,24 @@
   <pc:docChgLst>
     <pc:chgData name="juani vila bach" userId="140d79d91c36b714" providerId="LiveId" clId="{681BBBA0-CB6B-4408-8383-25A2ECA50787}"/>
     <pc:docChg chg="undo custSel modSld">
-      <pc:chgData name="juani vila bach" userId="140d79d91c36b714" providerId="LiveId" clId="{681BBBA0-CB6B-4408-8383-25A2ECA50787}" dt="2026-04-29T20:48:34.800" v="76" actId="1076"/>
+      <pc:chgData name="juani vila bach" userId="140d79d91c36b714" providerId="LiveId" clId="{681BBBA0-CB6B-4408-8383-25A2ECA50787}" dt="2026-04-30T13:33:30.402" v="82"/>
       <pc:docMkLst>
         <pc:docMk/>
       </pc:docMkLst>
-      <pc:sldChg chg="modSp mod">
-        <pc:chgData name="juani vila bach" userId="140d79d91c36b714" providerId="LiveId" clId="{681BBBA0-CB6B-4408-8383-25A2ECA50787}" dt="2026-04-29T20:47:04.565" v="20" actId="2711"/>
+      <pc:sldChg chg="addSp delSp modSp mod">
+        <pc:chgData name="juani vila bach" userId="140d79d91c36b714" providerId="LiveId" clId="{681BBBA0-CB6B-4408-8383-25A2ECA50787}" dt="2026-04-30T13:33:30.402" v="82"/>
         <pc:sldMkLst>
           <pc:docMk/>
           <pc:sldMk cId="0" sldId="258"/>
         </pc:sldMkLst>
+        <pc:spChg chg="add mod">
+          <ac:chgData name="juani vila bach" userId="140d79d91c36b714" providerId="LiveId" clId="{681BBBA0-CB6B-4408-8383-25A2ECA50787}" dt="2026-04-30T13:33:30.402" v="82"/>
+          <ac:spMkLst>
+            <pc:docMk/>
+            <pc:sldMk cId="0" sldId="258"/>
+            <ac:spMk id="2" creationId="{946A253D-85B1-831B-85E5-8F2987E2A2C1}"/>
+          </ac:spMkLst>
+        </pc:spChg>
         <pc:spChg chg="mod">
           <ac:chgData name="juani vila bach" userId="140d79d91c36b714" providerId="LiveId" clId="{681BBBA0-CB6B-4408-8383-25A2ECA50787}" dt="2026-04-29T20:47:04.565" v="20" actId="2711"/>
           <ac:spMkLst>
@@ -325,8 +333,8 @@
             <ac:spMk id="65" creationId="{00000000-0000-0000-0000-000000000000}"/>
           </ac:spMkLst>
         </pc:spChg>
-        <pc:spChg chg="mod">
-          <ac:chgData name="juani vila bach" userId="140d79d91c36b714" providerId="LiveId" clId="{681BBBA0-CB6B-4408-8383-25A2ECA50787}" dt="2026-04-29T19:02:50.123" v="17"/>
+        <pc:spChg chg="del mod">
+          <ac:chgData name="juani vila bach" userId="140d79d91c36b714" providerId="LiveId" clId="{681BBBA0-CB6B-4408-8383-25A2ECA50787}" dt="2026-04-30T13:33:29.423" v="81" actId="478"/>
           <ac:spMkLst>
             <pc:docMk/>
             <pc:sldMk cId="0" sldId="258"/>
@@ -335,7 +343,7 @@
         </pc:spChg>
       </pc:sldChg>
       <pc:sldChg chg="addSp delSp modSp mod">
-        <pc:chgData name="juani vila bach" userId="140d79d91c36b714" providerId="LiveId" clId="{681BBBA0-CB6B-4408-8383-25A2ECA50787}" dt="2026-04-29T20:47:56.206" v="68" actId="20577"/>
+        <pc:chgData name="juani vila bach" userId="140d79d91c36b714" providerId="LiveId" clId="{681BBBA0-CB6B-4408-8383-25A2ECA50787}" dt="2026-04-30T13:31:54.665" v="80" actId="1036"/>
         <pc:sldMkLst>
           <pc:docMk/>
           <pc:sldMk cId="0" sldId="259"/>
@@ -389,7 +397,7 @@
           </ac:spMkLst>
         </pc:spChg>
         <pc:spChg chg="add mod">
-          <ac:chgData name="juani vila bach" userId="140d79d91c36b714" providerId="LiveId" clId="{681BBBA0-CB6B-4408-8383-25A2ECA50787}" dt="2026-04-29T20:47:52.111" v="61" actId="20577"/>
+          <ac:chgData name="juani vila bach" userId="140d79d91c36b714" providerId="LiveId" clId="{681BBBA0-CB6B-4408-8383-25A2ECA50787}" dt="2026-04-30T13:31:54.665" v="80" actId="1036"/>
           <ac:spMkLst>
             <pc:docMk/>
             <pc:sldMk cId="0" sldId="259"/>
@@ -405,7 +413,7 @@
           </ac:spMkLst>
         </pc:spChg>
         <pc:spChg chg="add mod">
-          <ac:chgData name="juani vila bach" userId="140d79d91c36b714" providerId="LiveId" clId="{681BBBA0-CB6B-4408-8383-25A2ECA50787}" dt="2026-04-29T20:47:48.198" v="54" actId="20577"/>
+          <ac:chgData name="juani vila bach" userId="140d79d91c36b714" providerId="LiveId" clId="{681BBBA0-CB6B-4408-8383-25A2ECA50787}" dt="2026-04-30T13:31:54.665" v="80" actId="1036"/>
           <ac:spMkLst>
             <pc:docMk/>
             <pc:sldMk cId="0" sldId="259"/>
@@ -421,7 +429,7 @@
           </ac:spMkLst>
         </pc:spChg>
         <pc:spChg chg="add mod">
-          <ac:chgData name="juani vila bach" userId="140d79d91c36b714" providerId="LiveId" clId="{681BBBA0-CB6B-4408-8383-25A2ECA50787}" dt="2026-04-29T20:47:56.206" v="68" actId="20577"/>
+          <ac:chgData name="juani vila bach" userId="140d79d91c36b714" providerId="LiveId" clId="{681BBBA0-CB6B-4408-8383-25A2ECA50787}" dt="2026-04-30T13:31:54.665" v="80" actId="1036"/>
           <ac:spMkLst>
             <pc:docMk/>
             <pc:sldMk cId="0" sldId="259"/>
@@ -520,6 +528,45 @@
             <pc:docMk/>
             <pc:sldMk cId="0" sldId="261"/>
             <ac:spMk id="87" creationId="{00000000-0000-0000-0000-000000000000}"/>
+          </ac:spMkLst>
+        </pc:spChg>
+      </pc:sldChg>
+      <pc:sldChg chg="modSp mod">
+        <pc:chgData name="juani vila bach" userId="140d79d91c36b714" providerId="LiveId" clId="{681BBBA0-CB6B-4408-8383-25A2ECA50787}" dt="2026-04-30T13:31:21.074" v="77" actId="255"/>
+        <pc:sldMkLst>
+          <pc:docMk/>
+          <pc:sldMk cId="0" sldId="262"/>
+        </pc:sldMkLst>
+        <pc:spChg chg="mod">
+          <ac:chgData name="juani vila bach" userId="140d79d91c36b714" providerId="LiveId" clId="{681BBBA0-CB6B-4408-8383-25A2ECA50787}" dt="2026-04-30T13:31:21.074" v="77" actId="255"/>
+          <ac:spMkLst>
+            <pc:docMk/>
+            <pc:sldMk cId="0" sldId="262"/>
+            <ac:spMk id="94" creationId="{00000000-0000-0000-0000-000000000000}"/>
+          </ac:spMkLst>
+        </pc:spChg>
+        <pc:spChg chg="mod">
+          <ac:chgData name="juani vila bach" userId="140d79d91c36b714" providerId="LiveId" clId="{681BBBA0-CB6B-4408-8383-25A2ECA50787}" dt="2026-04-30T13:31:21.074" v="77" actId="255"/>
+          <ac:spMkLst>
+            <pc:docMk/>
+            <pc:sldMk cId="0" sldId="262"/>
+            <ac:spMk id="96" creationId="{00000000-0000-0000-0000-000000000000}"/>
+          </ac:spMkLst>
+        </pc:spChg>
+        <pc:spChg chg="mod">
+          <ac:chgData name="juani vila bach" userId="140d79d91c36b714" providerId="LiveId" clId="{681BBBA0-CB6B-4408-8383-25A2ECA50787}" dt="2026-04-30T13:31:21.074" v="77" actId="255"/>
+          <ac:spMkLst>
+            <pc:docMk/>
+            <pc:sldMk cId="0" sldId="262"/>
+            <ac:spMk id="98" creationId="{00000000-0000-0000-0000-000000000000}"/>
+          </ac:spMkLst>
+        </pc:spChg>
+        <pc:spChg chg="mod">
+          <ac:chgData name="juani vila bach" userId="140d79d91c36b714" providerId="LiveId" clId="{681BBBA0-CB6B-4408-8383-25A2ECA50787}" dt="2026-04-30T13:31:21.074" v="77" actId="255"/>
+          <ac:spMkLst>
+            <pc:docMk/>
+            <pc:sldMk cId="0" sldId="262"/>
+            <ac:spMk id="100" creationId="{00000000-0000-0000-0000-000000000000}"/>
           </ac:spMkLst>
         </pc:spChg>
       </pc:sldChg>
@@ -7095,14 +7142,20 @@
       </p:sp>
       <p:sp>
         <p:nvSpPr>
-          <p:cNvPr id="66" name="Google Shape;66;p15"/>
+          <p:cNvPr id="2" name="Google Shape;66;p15">
+            <a:extLst>
+              <a:ext uri="{FF2B5EF4-FFF2-40B4-BE49-F238E27FC236}">
+                <a16:creationId xmlns:a16="http://schemas.microsoft.com/office/drawing/2014/main" id="{946A253D-85B1-831B-85E5-8F2987E2A2C1}"/>
+              </a:ext>
+            </a:extLst>
+          </p:cNvPr>
           <p:cNvSpPr txBox="1"/>
           <p:nvPr/>
         </p:nvSpPr>
         <p:spPr>
           <a:xfrm>
-            <a:off x="900175" y="7675275"/>
-            <a:ext cx="8622900" cy="4832700"/>
+            <a:off x="2332255" y="7550584"/>
+            <a:ext cx="5542189" cy="4832700"/>
           </a:xfrm>
           <a:prstGeom prst="rect">
             <a:avLst/>
@@ -7118,11 +7171,19 @@
           </a:bodyPr>
           <a:lstStyle/>
           <a:p>
-            <a:pPr lvl="0" algn="ctr"/>
+            <a:pPr marL="0" lvl="0" indent="0" algn="ctr" rtl="0">
+              <a:spcBef>
+                <a:spcPts val="0"/>
+              </a:spcBef>
+              <a:spcAft>
+                <a:spcPts val="0"/>
+              </a:spcAft>
+              <a:buNone/>
+            </a:pPr>
             <a:r>
               <a:rPr lang="es-419" sz="2983" dirty="0">
                 <a:solidFill>
-                  <a:schemeClr val="dk2"/>
+                  <a:srgbClr val="595959"/>
                 </a:solidFill>
                 <a:latin typeface="Formular" panose="02000000000000000000" pitchFamily="2" charset="0"/>
                 <a:ea typeface="Public Sans Light"/>
@@ -7186,7 +7247,7 @@
         </p:nvSpPr>
         <p:spPr>
           <a:xfrm>
-            <a:off x="1450475" y="9424667"/>
+            <a:off x="1450475" y="9383103"/>
             <a:ext cx="7357200" cy="1597200"/>
           </a:xfrm>
           <a:prstGeom prst="rect">
@@ -7391,7 +7452,7 @@
         </p:nvSpPr>
         <p:spPr>
           <a:xfrm>
-            <a:off x="1450475" y="12164605"/>
+            <a:off x="1450475" y="12123041"/>
             <a:ext cx="7357200" cy="1597200"/>
           </a:xfrm>
           <a:prstGeom prst="rect">
@@ -7596,7 +7657,7 @@
         </p:nvSpPr>
         <p:spPr>
           <a:xfrm>
-            <a:off x="1450475" y="15207141"/>
+            <a:off x="1450475" y="15165577"/>
             <a:ext cx="7357200" cy="1597200"/>
           </a:xfrm>
           <a:prstGeom prst="rect">
@@ -8628,7 +8689,7 @@
               <a:buNone/>
             </a:pPr>
             <a:r>
-              <a:rPr lang="es-419" sz="2350" b="1" dirty="0">
+              <a:rPr lang="es-419" sz="2600" b="1" dirty="0">
                 <a:solidFill>
                   <a:schemeClr val="dk1"/>
                 </a:solidFill>
@@ -8639,7 +8700,7 @@
               </a:rPr>
               <a:t>&lt;&lt;CARRERA_01&gt;&gt;</a:t>
             </a:r>
-            <a:endParaRPr sz="2350" b="1" dirty="0">
+            <a:endParaRPr sz="2600" b="1" dirty="0">
               <a:solidFill>
                 <a:schemeClr val="dk1"/>
               </a:solidFill>
@@ -8797,7 +8858,7 @@
               <a:buNone/>
             </a:pPr>
             <a:r>
-              <a:rPr lang="es-419" sz="2350" b="1">
+              <a:rPr lang="es-419" sz="2600" b="1">
                 <a:solidFill>
                   <a:schemeClr val="dk1"/>
                 </a:solidFill>
@@ -8808,7 +8869,7 @@
               </a:rPr>
               <a:t>&lt;&lt;CARRERA_02&gt;&gt;</a:t>
             </a:r>
-            <a:endParaRPr sz="2350" b="1">
+            <a:endParaRPr sz="2600" b="1">
               <a:solidFill>
                 <a:schemeClr val="dk1"/>
               </a:solidFill>
@@ -8950,7 +9011,7 @@
               <a:buNone/>
             </a:pPr>
             <a:r>
-              <a:rPr lang="es-419" sz="2350" b="1">
+              <a:rPr lang="es-419" sz="2600" b="1">
                 <a:solidFill>
                   <a:schemeClr val="dk1"/>
                 </a:solidFill>
@@ -8961,7 +9022,7 @@
               </a:rPr>
               <a:t>&lt;&lt;CARRERA_03&gt;&gt;</a:t>
             </a:r>
-            <a:endParaRPr sz="2350" b="1">
+            <a:endParaRPr sz="2600" b="1">
               <a:solidFill>
                 <a:schemeClr val="dk1"/>
               </a:solidFill>
@@ -9103,7 +9164,7 @@
               <a:buNone/>
             </a:pPr>
             <a:r>
-              <a:rPr lang="es-419" sz="2350" b="1">
+              <a:rPr lang="es-419" sz="2600" b="1">
                 <a:solidFill>
                   <a:schemeClr val="dk1"/>
                 </a:solidFill>
@@ -9114,7 +9175,7 @@
               </a:rPr>
               <a:t>&lt;&lt;CARRERA_04&gt;&gt;</a:t>
             </a:r>
-            <a:endParaRPr sz="2350" b="1">
+            <a:endParaRPr sz="2600" b="1">
               <a:solidFill>
                 <a:schemeClr val="dk1"/>
               </a:solidFill>

--- a/assets/template_utp_padres.pptx
+++ b/assets/template_utp_padres.pptx
@@ -289,7 +289,7 @@
 <file path=ppt/revisionInfo.xml><?xml version="1.0" encoding="utf-8"?>
 <p1510:revInfo xmlns:a="http://schemas.openxmlformats.org/drawingml/2006/main" xmlns:r="http://schemas.openxmlformats.org/officeDocument/2006/relationships" xmlns:p1510="http://schemas.microsoft.com/office/powerpoint/2015/10/main">
   <p1510:revLst>
-    <p1510:client id="{1018A86B-94A9-4CC7-A11C-2E1EEF1DFD4E}" v="7" dt="2026-04-30T13:33:30.402"/>
+    <p1510:client id="{1018A86B-94A9-4CC7-A11C-2E1EEF1DFD4E}" v="8" dt="2026-04-30T19:26:41.442"/>
   </p1510:revLst>
 </p1510:revInfo>
 </file>
@@ -299,22 +299,30 @@
   <pc:docChgLst>
     <pc:chgData name="juani vila bach" userId="140d79d91c36b714" providerId="LiveId" clId="{681BBBA0-CB6B-4408-8383-25A2ECA50787}"/>
     <pc:docChg chg="undo custSel modSld">
-      <pc:chgData name="juani vila bach" userId="140d79d91c36b714" providerId="LiveId" clId="{681BBBA0-CB6B-4408-8383-25A2ECA50787}" dt="2026-04-30T13:33:30.402" v="82"/>
+      <pc:chgData name="juani vila bach" userId="140d79d91c36b714" providerId="LiveId" clId="{681BBBA0-CB6B-4408-8383-25A2ECA50787}" dt="2026-04-30T19:26:46.498" v="85" actId="1076"/>
       <pc:docMkLst>
         <pc:docMk/>
       </pc:docMkLst>
       <pc:sldChg chg="addSp delSp modSp mod">
-        <pc:chgData name="juani vila bach" userId="140d79d91c36b714" providerId="LiveId" clId="{681BBBA0-CB6B-4408-8383-25A2ECA50787}" dt="2026-04-30T13:33:30.402" v="82"/>
+        <pc:chgData name="juani vila bach" userId="140d79d91c36b714" providerId="LiveId" clId="{681BBBA0-CB6B-4408-8383-25A2ECA50787}" dt="2026-04-30T19:26:46.498" v="85" actId="1076"/>
         <pc:sldMkLst>
           <pc:docMk/>
           <pc:sldMk cId="0" sldId="258"/>
         </pc:sldMkLst>
-        <pc:spChg chg="add mod">
-          <ac:chgData name="juani vila bach" userId="140d79d91c36b714" providerId="LiveId" clId="{681BBBA0-CB6B-4408-8383-25A2ECA50787}" dt="2026-04-30T13:33:30.402" v="82"/>
+        <pc:spChg chg="add del mod">
+          <ac:chgData name="juani vila bach" userId="140d79d91c36b714" providerId="LiveId" clId="{681BBBA0-CB6B-4408-8383-25A2ECA50787}" dt="2026-04-30T19:26:40.779" v="83" actId="478"/>
           <ac:spMkLst>
             <pc:docMk/>
             <pc:sldMk cId="0" sldId="258"/>
             <ac:spMk id="2" creationId="{946A253D-85B1-831B-85E5-8F2987E2A2C1}"/>
+          </ac:spMkLst>
+        </pc:spChg>
+        <pc:spChg chg="add mod">
+          <ac:chgData name="juani vila bach" userId="140d79d91c36b714" providerId="LiveId" clId="{681BBBA0-CB6B-4408-8383-25A2ECA50787}" dt="2026-04-30T19:26:46.498" v="85" actId="1076"/>
+          <ac:spMkLst>
+            <pc:docMk/>
+            <pc:sldMk cId="0" sldId="258"/>
+            <ac:spMk id="3" creationId="{E45B287F-58A6-8485-55D0-F9E48B897313}"/>
           </ac:spMkLst>
         </pc:spChg>
         <pc:spChg chg="mod">
@@ -7142,10 +7150,10 @@
       </p:sp>
       <p:sp>
         <p:nvSpPr>
-          <p:cNvPr id="2" name="Google Shape;66;p15">
+          <p:cNvPr id="3" name="Google Shape;66;p15">
             <a:extLst>
               <a:ext uri="{FF2B5EF4-FFF2-40B4-BE49-F238E27FC236}">
-                <a16:creationId xmlns:a16="http://schemas.microsoft.com/office/drawing/2014/main" id="{946A253D-85B1-831B-85E5-8F2987E2A2C1}"/>
+                <a16:creationId xmlns:a16="http://schemas.microsoft.com/office/drawing/2014/main" id="{E45B287F-58A6-8485-55D0-F9E48B897313}"/>
               </a:ext>
             </a:extLst>
           </p:cNvPr>
@@ -7154,8 +7162,8 @@
         </p:nvSpPr>
         <p:spPr>
           <a:xfrm>
-            <a:off x="2332255" y="7550584"/>
-            <a:ext cx="5542189" cy="4832700"/>
+            <a:off x="1883853" y="7846419"/>
+            <a:ext cx="6519294" cy="4832700"/>
           </a:xfrm>
           <a:prstGeom prst="rect">
             <a:avLst/>

--- a/assets/template_utp_padres.pptx
+++ b/assets/template_utp_padres.pptx
@@ -299,7 +299,7 @@
   <pc:docChgLst>
     <pc:chgData name="juani vila bach" userId="140d79d91c36b714" providerId="LiveId" clId="{681BBBA0-CB6B-4408-8383-25A2ECA50787}"/>
     <pc:docChg chg="undo custSel modSld">
-      <pc:chgData name="juani vila bach" userId="140d79d91c36b714" providerId="LiveId" clId="{681BBBA0-CB6B-4408-8383-25A2ECA50787}" dt="2026-04-30T19:26:46.498" v="85" actId="1076"/>
+      <pc:chgData name="juani vila bach" userId="140d79d91c36b714" providerId="LiveId" clId="{681BBBA0-CB6B-4408-8383-25A2ECA50787}" dt="2026-05-11T19:21:06.521" v="91" actId="255"/>
       <pc:docMkLst>
         <pc:docMk/>
       </pc:docMkLst>
@@ -309,14 +309,6 @@
           <pc:docMk/>
           <pc:sldMk cId="0" sldId="258"/>
         </pc:sldMkLst>
-        <pc:spChg chg="add del mod">
-          <ac:chgData name="juani vila bach" userId="140d79d91c36b714" providerId="LiveId" clId="{681BBBA0-CB6B-4408-8383-25A2ECA50787}" dt="2026-04-30T19:26:40.779" v="83" actId="478"/>
-          <ac:spMkLst>
-            <pc:docMk/>
-            <pc:sldMk cId="0" sldId="258"/>
-            <ac:spMk id="2" creationId="{946A253D-85B1-831B-85E5-8F2987E2A2C1}"/>
-          </ac:spMkLst>
-        </pc:spChg>
         <pc:spChg chg="add mod">
           <ac:chgData name="juani vila bach" userId="140d79d91c36b714" providerId="LiveId" clId="{681BBBA0-CB6B-4408-8383-25A2ECA50787}" dt="2026-04-30T19:26:46.498" v="85" actId="1076"/>
           <ac:spMkLst>
@@ -341,71 +333,15 @@
             <ac:spMk id="65" creationId="{00000000-0000-0000-0000-000000000000}"/>
           </ac:spMkLst>
         </pc:spChg>
-        <pc:spChg chg="del mod">
-          <ac:chgData name="juani vila bach" userId="140d79d91c36b714" providerId="LiveId" clId="{681BBBA0-CB6B-4408-8383-25A2ECA50787}" dt="2026-04-30T13:33:29.423" v="81" actId="478"/>
-          <ac:spMkLst>
-            <pc:docMk/>
-            <pc:sldMk cId="0" sldId="258"/>
-            <ac:spMk id="66" creationId="{00000000-0000-0000-0000-000000000000}"/>
-          </ac:spMkLst>
-        </pc:spChg>
       </pc:sldChg>
       <pc:sldChg chg="addSp delSp modSp mod">
-        <pc:chgData name="juani vila bach" userId="140d79d91c36b714" providerId="LiveId" clId="{681BBBA0-CB6B-4408-8383-25A2ECA50787}" dt="2026-04-30T13:31:54.665" v="80" actId="1036"/>
+        <pc:chgData name="juani vila bach" userId="140d79d91c36b714" providerId="LiveId" clId="{681BBBA0-CB6B-4408-8383-25A2ECA50787}" dt="2026-05-11T19:20:55.465" v="90" actId="1036"/>
         <pc:sldMkLst>
           <pc:docMk/>
           <pc:sldMk cId="0" sldId="259"/>
         </pc:sldMkLst>
         <pc:spChg chg="add mod">
-          <ac:chgData name="juani vila bach" userId="140d79d91c36b714" providerId="LiveId" clId="{681BBBA0-CB6B-4408-8383-25A2ECA50787}" dt="2026-04-29T20:47:36.645" v="41" actId="20577"/>
-          <ac:spMkLst>
-            <pc:docMk/>
-            <pc:sldMk cId="0" sldId="259"/>
-            <ac:spMk id="2" creationId="{A7ACE86D-BE89-764F-A30D-31A6764B17B9}"/>
-          </ac:spMkLst>
-        </pc:spChg>
-        <pc:spChg chg="add mod">
-          <ac:chgData name="juani vila bach" userId="140d79d91c36b714" providerId="LiveId" clId="{681BBBA0-CB6B-4408-8383-25A2ECA50787}" dt="2026-04-29T20:47:24.509" v="22"/>
-          <ac:spMkLst>
-            <pc:docMk/>
-            <pc:sldMk cId="0" sldId="259"/>
-            <ac:spMk id="3" creationId="{91D17890-EDB0-36E1-087F-1BE8401EE429}"/>
-          </ac:spMkLst>
-        </pc:spChg>
-        <pc:spChg chg="add mod">
-          <ac:chgData name="juani vila bach" userId="140d79d91c36b714" providerId="LiveId" clId="{681BBBA0-CB6B-4408-8383-25A2ECA50787}" dt="2026-04-29T20:47:36.442" v="40" actId="20577"/>
-          <ac:spMkLst>
-            <pc:docMk/>
-            <pc:sldMk cId="0" sldId="259"/>
-            <ac:spMk id="4" creationId="{5181C0F9-BE78-5B10-7C10-80F27D956745}"/>
-          </ac:spMkLst>
-        </pc:spChg>
-        <pc:spChg chg="add mod">
-          <ac:chgData name="juani vila bach" userId="140d79d91c36b714" providerId="LiveId" clId="{681BBBA0-CB6B-4408-8383-25A2ECA50787}" dt="2026-04-29T20:47:24.509" v="22"/>
-          <ac:spMkLst>
-            <pc:docMk/>
-            <pc:sldMk cId="0" sldId="259"/>
-            <ac:spMk id="5" creationId="{74D32D8D-59DE-27BF-B954-77F45D82AE58}"/>
-          </ac:spMkLst>
-        </pc:spChg>
-        <pc:spChg chg="add mod">
-          <ac:chgData name="juani vila bach" userId="140d79d91c36b714" providerId="LiveId" clId="{681BBBA0-CB6B-4408-8383-25A2ECA50787}" dt="2026-04-29T20:47:36.182" v="39" actId="20577"/>
-          <ac:spMkLst>
-            <pc:docMk/>
-            <pc:sldMk cId="0" sldId="259"/>
-            <ac:spMk id="6" creationId="{259FF831-0D4C-B0D3-7440-0B2F8FFEA3F6}"/>
-          </ac:spMkLst>
-        </pc:spChg>
-        <pc:spChg chg="add mod">
-          <ac:chgData name="juani vila bach" userId="140d79d91c36b714" providerId="LiveId" clId="{681BBBA0-CB6B-4408-8383-25A2ECA50787}" dt="2026-04-29T20:47:24.509" v="22"/>
-          <ac:spMkLst>
-            <pc:docMk/>
-            <pc:sldMk cId="0" sldId="259"/>
-            <ac:spMk id="7" creationId="{329AF43C-B5AE-FA45-270C-D97764193DE3}"/>
-          </ac:spMkLst>
-        </pc:spChg>
-        <pc:spChg chg="add mod">
-          <ac:chgData name="juani vila bach" userId="140d79d91c36b714" providerId="LiveId" clId="{681BBBA0-CB6B-4408-8383-25A2ECA50787}" dt="2026-04-30T13:31:54.665" v="80" actId="1036"/>
+          <ac:chgData name="juani vila bach" userId="140d79d91c36b714" providerId="LiveId" clId="{681BBBA0-CB6B-4408-8383-25A2ECA50787}" dt="2026-05-11T19:20:55.465" v="90" actId="1036"/>
           <ac:spMkLst>
             <pc:docMk/>
             <pc:sldMk cId="0" sldId="259"/>
@@ -421,7 +357,7 @@
           </ac:spMkLst>
         </pc:spChg>
         <pc:spChg chg="add mod">
-          <ac:chgData name="juani vila bach" userId="140d79d91c36b714" providerId="LiveId" clId="{681BBBA0-CB6B-4408-8383-25A2ECA50787}" dt="2026-04-30T13:31:54.665" v="80" actId="1036"/>
+          <ac:chgData name="juani vila bach" userId="140d79d91c36b714" providerId="LiveId" clId="{681BBBA0-CB6B-4408-8383-25A2ECA50787}" dt="2026-05-11T19:20:55.465" v="90" actId="1036"/>
           <ac:spMkLst>
             <pc:docMk/>
             <pc:sldMk cId="0" sldId="259"/>
@@ -437,7 +373,7 @@
           </ac:spMkLst>
         </pc:spChg>
         <pc:spChg chg="add mod">
-          <ac:chgData name="juani vila bach" userId="140d79d91c36b714" providerId="LiveId" clId="{681BBBA0-CB6B-4408-8383-25A2ECA50787}" dt="2026-04-30T13:31:54.665" v="80" actId="1036"/>
+          <ac:chgData name="juani vila bach" userId="140d79d91c36b714" providerId="LiveId" clId="{681BBBA0-CB6B-4408-8383-25A2ECA50787}" dt="2026-05-11T19:20:55.465" v="90" actId="1036"/>
           <ac:spMkLst>
             <pc:docMk/>
             <pc:sldMk cId="0" sldId="259"/>
@@ -450,54 +386,6 @@
             <pc:docMk/>
             <pc:sldMk cId="0" sldId="259"/>
             <ac:spMk id="13" creationId="{7B669BB3-5AC2-D363-B2DC-30CE1EC4B127}"/>
-          </ac:spMkLst>
-        </pc:spChg>
-        <pc:spChg chg="add del mod">
-          <ac:chgData name="juani vila bach" userId="140d79d91c36b714" providerId="LiveId" clId="{681BBBA0-CB6B-4408-8383-25A2ECA50787}" dt="2026-04-29T20:47:43.533" v="46" actId="478"/>
-          <ac:spMkLst>
-            <pc:docMk/>
-            <pc:sldMk cId="0" sldId="259"/>
-            <ac:spMk id="71" creationId="{00000000-0000-0000-0000-000000000000}"/>
-          </ac:spMkLst>
-        </pc:spChg>
-        <pc:spChg chg="add del mod">
-          <ac:chgData name="juani vila bach" userId="140d79d91c36b714" providerId="LiveId" clId="{681BBBA0-CB6B-4408-8383-25A2ECA50787}" dt="2026-04-29T20:47:43.533" v="46" actId="478"/>
-          <ac:spMkLst>
-            <pc:docMk/>
-            <pc:sldMk cId="0" sldId="259"/>
-            <ac:spMk id="72" creationId="{00000000-0000-0000-0000-000000000000}"/>
-          </ac:spMkLst>
-        </pc:spChg>
-        <pc:spChg chg="add del mod">
-          <ac:chgData name="juani vila bach" userId="140d79d91c36b714" providerId="LiveId" clId="{681BBBA0-CB6B-4408-8383-25A2ECA50787}" dt="2026-04-29T20:47:43.533" v="46" actId="478"/>
-          <ac:spMkLst>
-            <pc:docMk/>
-            <pc:sldMk cId="0" sldId="259"/>
-            <ac:spMk id="73" creationId="{00000000-0000-0000-0000-000000000000}"/>
-          </ac:spMkLst>
-        </pc:spChg>
-        <pc:spChg chg="add del mod">
-          <ac:chgData name="juani vila bach" userId="140d79d91c36b714" providerId="LiveId" clId="{681BBBA0-CB6B-4408-8383-25A2ECA50787}" dt="2026-04-29T20:47:43.533" v="46" actId="478"/>
-          <ac:spMkLst>
-            <pc:docMk/>
-            <pc:sldMk cId="0" sldId="259"/>
-            <ac:spMk id="74" creationId="{00000000-0000-0000-0000-000000000000}"/>
-          </ac:spMkLst>
-        </pc:spChg>
-        <pc:spChg chg="add del mod">
-          <ac:chgData name="juani vila bach" userId="140d79d91c36b714" providerId="LiveId" clId="{681BBBA0-CB6B-4408-8383-25A2ECA50787}" dt="2026-04-29T20:47:43.533" v="46" actId="478"/>
-          <ac:spMkLst>
-            <pc:docMk/>
-            <pc:sldMk cId="0" sldId="259"/>
-            <ac:spMk id="75" creationId="{00000000-0000-0000-0000-000000000000}"/>
-          </ac:spMkLst>
-        </pc:spChg>
-        <pc:spChg chg="add del mod">
-          <ac:chgData name="juani vila bach" userId="140d79d91c36b714" providerId="LiveId" clId="{681BBBA0-CB6B-4408-8383-25A2ECA50787}" dt="2026-04-29T20:47:43.533" v="46" actId="478"/>
-          <ac:spMkLst>
-            <pc:docMk/>
-            <pc:sldMk cId="0" sldId="259"/>
-            <ac:spMk id="76" creationId="{00000000-0000-0000-0000-000000000000}"/>
           </ac:spMkLst>
         </pc:spChg>
       </pc:sldChg>
@@ -513,14 +401,6 @@
             <pc:docMk/>
             <pc:sldMk cId="0" sldId="260"/>
             <ac:spMk id="2" creationId="{3808622E-C38C-C1E0-FD64-91A2DD39376D}"/>
-          </ac:spMkLst>
-        </pc:spChg>
-        <pc:spChg chg="del">
-          <ac:chgData name="juani vila bach" userId="140d79d91c36b714" providerId="LiveId" clId="{681BBBA0-CB6B-4408-8383-25A2ECA50787}" dt="2026-04-29T20:48:11.862" v="69" actId="478"/>
-          <ac:spMkLst>
-            <pc:docMk/>
-            <pc:sldMk cId="0" sldId="260"/>
-            <ac:spMk id="81" creationId="{00000000-0000-0000-0000-000000000000}"/>
           </ac:spMkLst>
         </pc:spChg>
       </pc:sldChg>
@@ -540,7 +420,7 @@
         </pc:spChg>
       </pc:sldChg>
       <pc:sldChg chg="modSp mod">
-        <pc:chgData name="juani vila bach" userId="140d79d91c36b714" providerId="LiveId" clId="{681BBBA0-CB6B-4408-8383-25A2ECA50787}" dt="2026-04-30T13:31:21.074" v="77" actId="255"/>
+        <pc:chgData name="juani vila bach" userId="140d79d91c36b714" providerId="LiveId" clId="{681BBBA0-CB6B-4408-8383-25A2ECA50787}" dt="2026-05-11T19:21:06.521" v="91" actId="255"/>
         <pc:sldMkLst>
           <pc:docMk/>
           <pc:sldMk cId="0" sldId="262"/>
@@ -554,11 +434,27 @@
           </ac:spMkLst>
         </pc:spChg>
         <pc:spChg chg="mod">
+          <ac:chgData name="juani vila bach" userId="140d79d91c36b714" providerId="LiveId" clId="{681BBBA0-CB6B-4408-8383-25A2ECA50787}" dt="2026-05-11T19:21:06.521" v="91" actId="255"/>
+          <ac:spMkLst>
+            <pc:docMk/>
+            <pc:sldMk cId="0" sldId="262"/>
+            <ac:spMk id="95" creationId="{00000000-0000-0000-0000-000000000000}"/>
+          </ac:spMkLst>
+        </pc:spChg>
+        <pc:spChg chg="mod">
           <ac:chgData name="juani vila bach" userId="140d79d91c36b714" providerId="LiveId" clId="{681BBBA0-CB6B-4408-8383-25A2ECA50787}" dt="2026-04-30T13:31:21.074" v="77" actId="255"/>
           <ac:spMkLst>
             <pc:docMk/>
             <pc:sldMk cId="0" sldId="262"/>
             <ac:spMk id="96" creationId="{00000000-0000-0000-0000-000000000000}"/>
+          </ac:spMkLst>
+        </pc:spChg>
+        <pc:spChg chg="mod">
+          <ac:chgData name="juani vila bach" userId="140d79d91c36b714" providerId="LiveId" clId="{681BBBA0-CB6B-4408-8383-25A2ECA50787}" dt="2026-05-11T19:21:06.521" v="91" actId="255"/>
+          <ac:spMkLst>
+            <pc:docMk/>
+            <pc:sldMk cId="0" sldId="262"/>
+            <ac:spMk id="97" creationId="{00000000-0000-0000-0000-000000000000}"/>
           </ac:spMkLst>
         </pc:spChg>
         <pc:spChg chg="mod">
@@ -570,11 +466,27 @@
           </ac:spMkLst>
         </pc:spChg>
         <pc:spChg chg="mod">
+          <ac:chgData name="juani vila bach" userId="140d79d91c36b714" providerId="LiveId" clId="{681BBBA0-CB6B-4408-8383-25A2ECA50787}" dt="2026-05-11T19:21:06.521" v="91" actId="255"/>
+          <ac:spMkLst>
+            <pc:docMk/>
+            <pc:sldMk cId="0" sldId="262"/>
+            <ac:spMk id="99" creationId="{00000000-0000-0000-0000-000000000000}"/>
+          </ac:spMkLst>
+        </pc:spChg>
+        <pc:spChg chg="mod">
           <ac:chgData name="juani vila bach" userId="140d79d91c36b714" providerId="LiveId" clId="{681BBBA0-CB6B-4408-8383-25A2ECA50787}" dt="2026-04-30T13:31:21.074" v="77" actId="255"/>
           <ac:spMkLst>
             <pc:docMk/>
             <pc:sldMk cId="0" sldId="262"/>
             <ac:spMk id="100" creationId="{00000000-0000-0000-0000-000000000000}"/>
+          </ac:spMkLst>
+        </pc:spChg>
+        <pc:spChg chg="mod">
+          <ac:chgData name="juani vila bach" userId="140d79d91c36b714" providerId="LiveId" clId="{681BBBA0-CB6B-4408-8383-25A2ECA50787}" dt="2026-05-11T19:21:06.521" v="91" actId="255"/>
+          <ac:spMkLst>
+            <pc:docMk/>
+            <pc:sldMk cId="0" sldId="262"/>
+            <ac:spMk id="101" creationId="{00000000-0000-0000-0000-000000000000}"/>
           </ac:spMkLst>
         </pc:spChg>
       </pc:sldChg>
@@ -7255,7 +7167,7 @@
         </p:nvSpPr>
         <p:spPr>
           <a:xfrm>
-            <a:off x="1450475" y="9383103"/>
+            <a:off x="1450475" y="9329315"/>
             <a:ext cx="7357200" cy="1597200"/>
           </a:xfrm>
           <a:prstGeom prst="rect">
@@ -7286,7 +7198,7 @@
               <a:buNone/>
             </a:pPr>
             <a:r>
-              <a:rPr lang="es-419" sz="2000" dirty="0">
+              <a:rPr lang="es-419" sz="1600" dirty="0">
                 <a:solidFill>
                   <a:schemeClr val="dk1"/>
                 </a:solidFill>
@@ -7297,7 +7209,7 @@
               </a:rPr>
               <a:t>&lt;&lt;gardner_padres_01_desc&gt;&gt;</a:t>
             </a:r>
-            <a:endParaRPr sz="2000" dirty="0">
+            <a:endParaRPr sz="1600" dirty="0">
               <a:solidFill>
                 <a:schemeClr val="dk1"/>
               </a:solidFill>
@@ -7321,7 +7233,7 @@
               <a:buSzPts val="853"/>
               <a:buNone/>
             </a:pPr>
-            <a:endParaRPr sz="1850" dirty="0">
+            <a:endParaRPr sz="1600" dirty="0">
               <a:solidFill>
                 <a:schemeClr val="dk1"/>
               </a:solidFill>
@@ -7342,7 +7254,7 @@
               <a:buSzPts val="853"/>
               <a:buNone/>
             </a:pPr>
-            <a:endParaRPr sz="1850" dirty="0">
+            <a:endParaRPr sz="1600" dirty="0">
               <a:solidFill>
                 <a:schemeClr val="dk2"/>
               </a:solidFill>
@@ -7460,7 +7372,7 @@
         </p:nvSpPr>
         <p:spPr>
           <a:xfrm>
-            <a:off x="1450475" y="12123041"/>
+            <a:off x="1450475" y="12069253"/>
             <a:ext cx="7357200" cy="1597200"/>
           </a:xfrm>
           <a:prstGeom prst="rect">
@@ -7491,7 +7403,7 @@
               <a:buNone/>
             </a:pPr>
             <a:r>
-              <a:rPr lang="es-419" sz="2000" dirty="0">
+              <a:rPr lang="es-419" sz="1600" dirty="0">
                 <a:solidFill>
                   <a:schemeClr val="dk1"/>
                 </a:solidFill>
@@ -7502,7 +7414,7 @@
               </a:rPr>
               <a:t>&lt;&lt;gardner_padres_02_desc&gt;&gt;</a:t>
             </a:r>
-            <a:endParaRPr sz="2000" dirty="0">
+            <a:endParaRPr sz="1600" dirty="0">
               <a:solidFill>
                 <a:schemeClr val="dk1"/>
               </a:solidFill>
@@ -7526,7 +7438,7 @@
               <a:buSzPts val="853"/>
               <a:buNone/>
             </a:pPr>
-            <a:endParaRPr sz="1850" dirty="0">
+            <a:endParaRPr sz="1600" dirty="0">
               <a:solidFill>
                 <a:schemeClr val="dk1"/>
               </a:solidFill>
@@ -7547,7 +7459,7 @@
               <a:buSzPts val="853"/>
               <a:buNone/>
             </a:pPr>
-            <a:endParaRPr sz="1850" dirty="0">
+            <a:endParaRPr sz="1600" dirty="0">
               <a:solidFill>
                 <a:schemeClr val="dk2"/>
               </a:solidFill>
@@ -7665,7 +7577,7 @@
         </p:nvSpPr>
         <p:spPr>
           <a:xfrm>
-            <a:off x="1450475" y="15165577"/>
+            <a:off x="1450475" y="15111789"/>
             <a:ext cx="7357200" cy="1597200"/>
           </a:xfrm>
           <a:prstGeom prst="rect">
@@ -7696,7 +7608,7 @@
               <a:buNone/>
             </a:pPr>
             <a:r>
-              <a:rPr lang="es-419" sz="2000" dirty="0">
+              <a:rPr lang="es-419" sz="1600" dirty="0">
                 <a:solidFill>
                   <a:schemeClr val="dk1"/>
                 </a:solidFill>
@@ -7707,7 +7619,7 @@
               </a:rPr>
               <a:t>&lt;&lt;gardner_padres_03_desc&gt;&gt;</a:t>
             </a:r>
-            <a:endParaRPr sz="2000" dirty="0">
+            <a:endParaRPr sz="1600" dirty="0">
               <a:solidFill>
                 <a:schemeClr val="dk1"/>
               </a:solidFill>
@@ -7731,7 +7643,7 @@
               <a:buSzPts val="853"/>
               <a:buNone/>
             </a:pPr>
-            <a:endParaRPr sz="1850" dirty="0">
+            <a:endParaRPr sz="1600" dirty="0">
               <a:solidFill>
                 <a:schemeClr val="dk1"/>
               </a:solidFill>
@@ -7752,7 +7664,7 @@
               <a:buSzPts val="853"/>
               <a:buNone/>
             </a:pPr>
-            <a:endParaRPr sz="1850" dirty="0">
+            <a:endParaRPr sz="1600" dirty="0">
               <a:solidFill>
                 <a:schemeClr val="dk2"/>
               </a:solidFill>
@@ -8759,7 +8671,7 @@
               <a:buNone/>
             </a:pPr>
             <a:r>
-              <a:rPr lang="es-419" sz="2000" dirty="0">
+              <a:rPr lang="es-419" sz="1600" dirty="0">
                 <a:solidFill>
                   <a:schemeClr val="dk1"/>
                 </a:solidFill>
@@ -8770,7 +8682,7 @@
               </a:rPr>
               <a:t>&lt;&lt;carrera_padres_01_desc&gt;&gt;</a:t>
             </a:r>
-            <a:endParaRPr sz="2000" dirty="0">
+            <a:endParaRPr sz="1600" dirty="0">
               <a:solidFill>
                 <a:schemeClr val="dk1"/>
               </a:solidFill>
@@ -8794,7 +8706,7 @@
               <a:buSzPts val="853"/>
               <a:buNone/>
             </a:pPr>
-            <a:endParaRPr sz="1850" dirty="0">
+            <a:endParaRPr sz="1600" dirty="0">
               <a:solidFill>
                 <a:schemeClr val="dk1"/>
               </a:solidFill>
@@ -8815,7 +8727,7 @@
               <a:buSzPts val="853"/>
               <a:buNone/>
             </a:pPr>
-            <a:endParaRPr sz="1850" dirty="0">
+            <a:endParaRPr sz="1600" dirty="0">
               <a:solidFill>
                 <a:schemeClr val="dk2"/>
               </a:solidFill>
@@ -8921,7 +8833,7 @@
               <a:buSzPts val="853"/>
             </a:pPr>
             <a:r>
-              <a:rPr lang="es-419" sz="2000" dirty="0">
+              <a:rPr lang="es-419" sz="1600" dirty="0">
                 <a:solidFill>
                   <a:schemeClr val="dk1"/>
                 </a:solidFill>
@@ -8947,7 +8859,7 @@
               <a:buSzPts val="853"/>
               <a:buNone/>
             </a:pPr>
-            <a:endParaRPr sz="1850" dirty="0">
+            <a:endParaRPr sz="1600" dirty="0">
               <a:solidFill>
                 <a:schemeClr val="dk1"/>
               </a:solidFill>
@@ -8968,7 +8880,7 @@
               <a:buSzPts val="853"/>
               <a:buNone/>
             </a:pPr>
-            <a:endParaRPr sz="1850" dirty="0">
+            <a:endParaRPr sz="1600" dirty="0">
               <a:solidFill>
                 <a:schemeClr val="dk2"/>
               </a:solidFill>
@@ -9074,7 +8986,7 @@
               <a:buSzPts val="853"/>
             </a:pPr>
             <a:r>
-              <a:rPr lang="es-419" sz="2000" dirty="0">
+              <a:rPr lang="es-419" sz="1600" dirty="0">
                 <a:solidFill>
                   <a:schemeClr val="dk1"/>
                 </a:solidFill>
@@ -9100,7 +9012,7 @@
               <a:buSzPts val="853"/>
               <a:buNone/>
             </a:pPr>
-            <a:endParaRPr sz="1850" dirty="0">
+            <a:endParaRPr sz="1600" dirty="0">
               <a:solidFill>
                 <a:schemeClr val="dk1"/>
               </a:solidFill>
@@ -9121,7 +9033,7 @@
               <a:buSzPts val="853"/>
               <a:buNone/>
             </a:pPr>
-            <a:endParaRPr sz="1850" dirty="0">
+            <a:endParaRPr sz="1600" dirty="0">
               <a:solidFill>
                 <a:schemeClr val="dk2"/>
               </a:solidFill>
@@ -9227,7 +9139,7 @@
               <a:buSzPts val="853"/>
             </a:pPr>
             <a:r>
-              <a:rPr lang="es-419" sz="2000" dirty="0">
+              <a:rPr lang="es-419" sz="1600" dirty="0">
                 <a:solidFill>
                   <a:schemeClr val="dk1"/>
                 </a:solidFill>
@@ -9253,7 +9165,7 @@
               <a:buSzPts val="853"/>
               <a:buNone/>
             </a:pPr>
-            <a:endParaRPr sz="1850" dirty="0">
+            <a:endParaRPr sz="1600" dirty="0">
               <a:solidFill>
                 <a:schemeClr val="dk1"/>
               </a:solidFill>
@@ -9274,7 +9186,7 @@
               <a:buSzPts val="853"/>
               <a:buNone/>
             </a:pPr>
-            <a:endParaRPr sz="1850" dirty="0">
+            <a:endParaRPr sz="1600" dirty="0">
               <a:solidFill>
                 <a:schemeClr val="dk2"/>
               </a:solidFill>

--- a/assets/template_utp_padres.pptx
+++ b/assets/template_utp_padres.pptx
@@ -6686,6 +6686,30 @@
               <a:buNone/>
             </a:pPr>
             <a:r>
+              <a:rPr lang="es-419" sz="3483" dirty="0">
+                <a:solidFill>
+                  <a:srgbClr val="8E8E8E"/>
+                </a:solidFill>
+                <a:latin typeface="Formular" panose="02000000000000000000" pitchFamily="2" charset="0"/>
+                <a:ea typeface="Public Sans"/>
+                <a:cs typeface="Public Sans"/>
+                <a:sym typeface="Public Sans"/>
+              </a:rPr>
+              <a:t>Alumno/a</a:t>
+            </a:r>
+            <a:r>
+              <a:rPr lang="es-419" sz="3483" dirty="0">
+                <a:solidFill>
+                  <a:schemeClr val="bg2"/>
+                </a:solidFill>
+                <a:latin typeface="Formular" panose="02000000000000000000" pitchFamily="2" charset="0"/>
+                <a:ea typeface="Public Sans"/>
+                <a:cs typeface="Public Sans"/>
+                <a:sym typeface="Public Sans"/>
+              </a:rPr>
+              <a:t> </a:t>
+            </a:r>
+            <a:r>
               <a:rPr lang="es-419" sz="3483" b="1" dirty="0">
                 <a:solidFill>
                   <a:schemeClr val="dk1"/>

--- a/assets/template_utp_padres.pptx
+++ b/assets/template_utp_padres.pptx
@@ -6686,30 +6686,6 @@
               <a:buNone/>
             </a:pPr>
             <a:r>
-              <a:rPr lang="es-419" sz="3483" dirty="0">
-                <a:solidFill>
-                  <a:srgbClr val="8E8E8E"/>
-                </a:solidFill>
-                <a:latin typeface="Formular" panose="02000000000000000000" pitchFamily="2" charset="0"/>
-                <a:ea typeface="Public Sans"/>
-                <a:cs typeface="Public Sans"/>
-                <a:sym typeface="Public Sans"/>
-              </a:rPr>
-              <a:t>Alumno/a</a:t>
-            </a:r>
-            <a:r>
-              <a:rPr lang="es-419" sz="3483" dirty="0">
-                <a:solidFill>
-                  <a:schemeClr val="bg2"/>
-                </a:solidFill>
-                <a:latin typeface="Formular" panose="02000000000000000000" pitchFamily="2" charset="0"/>
-                <a:ea typeface="Public Sans"/>
-                <a:cs typeface="Public Sans"/>
-                <a:sym typeface="Public Sans"/>
-              </a:rPr>
-              <a:t> </a:t>
-            </a:r>
-            <a:r>
               <a:rPr lang="es-419" sz="3483" b="1" dirty="0">
                 <a:solidFill>
                   <a:schemeClr val="dk1"/>
@@ -6754,6 +6730,62 @@
               <a:cs typeface="Public Sans"/>
               <a:sym typeface="Public Sans"/>
             </a:endParaRPr>
+          </a:p>
+        </p:txBody>
+      </p:sp>
+      <p:sp>
+        <p:nvSpPr>
+          <p:cNvPr id="3" name="TextBox 2">
+            <a:extLst>
+              <a:ext uri="{FF2B5EF4-FFF2-40B4-BE49-F238E27FC236}">
+                <a16:creationId xmlns:a16="http://schemas.microsoft.com/office/drawing/2014/main" id="{0C1FA4A7-B14F-194A-F119-1D45CE90A60D}"/>
+              </a:ext>
+            </a:extLst>
+          </p:cNvPr>
+          <p:cNvSpPr txBox="1"/>
+          <p:nvPr/>
+        </p:nvSpPr>
+        <p:spPr>
+          <a:xfrm>
+            <a:off x="722585" y="2432358"/>
+            <a:ext cx="5145024" cy="369332"/>
+          </a:xfrm>
+          <a:prstGeom prst="rect">
+            <a:avLst/>
+          </a:prstGeom>
+          <a:noFill/>
+        </p:spPr>
+        <p:txBody>
+          <a:bodyPr wrap="square">
+            <a:spAutoFit/>
+          </a:bodyPr>
+          <a:lstStyle/>
+          <a:p>
+            <a:r>
+              <a:rPr lang="es-419" sz="1800" dirty="0">
+                <a:solidFill>
+                  <a:srgbClr val="8E8E8E"/>
+                </a:solidFill>
+                <a:latin typeface="Formular" panose="02000000000000000000" pitchFamily="2" charset="0"/>
+                <a:ea typeface="Public Sans"/>
+                <a:cs typeface="Public Sans"/>
+                <a:sym typeface="Public Sans"/>
+              </a:rPr>
+              <a:t>Alumno/a</a:t>
+            </a:r>
+            <a:r>
+              <a:rPr lang="es-419" sz="1800" dirty="0">
+                <a:solidFill>
+                  <a:schemeClr val="bg2"/>
+                </a:solidFill>
+                <a:latin typeface="Formular" panose="02000000000000000000" pitchFamily="2" charset="0"/>
+                <a:ea typeface="Public Sans"/>
+                <a:cs typeface="Public Sans"/>
+                <a:sym typeface="Public Sans"/>
+              </a:rPr>
+              <a:t> </a:t>
+            </a:r>
+            <a:endParaRPr lang="en-GB" sz="1800" dirty="0"/>
           </a:p>
         </p:txBody>
       </p:sp>

--- a/assets/template_utp_padres.pptx
+++ b/assets/template_utp_padres.pptx
@@ -6651,6 +6651,36 @@
           <a:chExt cx="0" cy="0"/>
         </a:xfrm>
       </p:grpSpPr>
+      <p:pic>
+        <p:nvPicPr>
+          <p:cNvPr id="4" name="Picture 3">
+            <a:extLst>
+              <a:ext uri="{FF2B5EF4-FFF2-40B4-BE49-F238E27FC236}">
+                <a16:creationId xmlns:a16="http://schemas.microsoft.com/office/drawing/2014/main" id="{1D1513A7-6D62-289B-CE99-FAF228458268}"/>
+              </a:ext>
+            </a:extLst>
+          </p:cNvPr>
+          <p:cNvPicPr>
+            <a:picLocks noChangeAspect="1"/>
+          </p:cNvPicPr>
+          <p:nvPr/>
+        </p:nvPicPr>
+        <p:blipFill>
+          <a:blip r:embed="rId4"/>
+          <a:stretch>
+            <a:fillRect/>
+          </a:stretch>
+        </p:blipFill>
+        <p:spPr>
+          <a:xfrm>
+            <a:off x="0" y="0"/>
+            <a:ext cx="10287000" cy="18288000"/>
+          </a:xfrm>
+          <a:prstGeom prst="rect">
+            <a:avLst/>
+          </a:prstGeom>
+        </p:spPr>
+      </p:pic>
       <p:sp>
         <p:nvSpPr>
           <p:cNvPr id="54" name="Google Shape;54;p13"/>
@@ -6659,7 +6689,7 @@
         </p:nvSpPr>
         <p:spPr>
           <a:xfrm>
-            <a:off x="722585" y="2801690"/>
+            <a:off x="764250" y="3036152"/>
             <a:ext cx="8758500" cy="804600"/>
           </a:xfrm>
           <a:prstGeom prst="rect">
@@ -6730,62 +6760,6 @@
               <a:cs typeface="Public Sans"/>
               <a:sym typeface="Public Sans"/>
             </a:endParaRPr>
-          </a:p>
-        </p:txBody>
-      </p:sp>
-      <p:sp>
-        <p:nvSpPr>
-          <p:cNvPr id="3" name="TextBox 2">
-            <a:extLst>
-              <a:ext uri="{FF2B5EF4-FFF2-40B4-BE49-F238E27FC236}">
-                <a16:creationId xmlns:a16="http://schemas.microsoft.com/office/drawing/2014/main" id="{0C1FA4A7-B14F-194A-F119-1D45CE90A60D}"/>
-              </a:ext>
-            </a:extLst>
-          </p:cNvPr>
-          <p:cNvSpPr txBox="1"/>
-          <p:nvPr/>
-        </p:nvSpPr>
-        <p:spPr>
-          <a:xfrm>
-            <a:off x="722585" y="2432358"/>
-            <a:ext cx="5145024" cy="369332"/>
-          </a:xfrm>
-          <a:prstGeom prst="rect">
-            <a:avLst/>
-          </a:prstGeom>
-          <a:noFill/>
-        </p:spPr>
-        <p:txBody>
-          <a:bodyPr wrap="square">
-            <a:spAutoFit/>
-          </a:bodyPr>
-          <a:lstStyle/>
-          <a:p>
-            <a:r>
-              <a:rPr lang="es-419" sz="1800" dirty="0">
-                <a:solidFill>
-                  <a:srgbClr val="8E8E8E"/>
-                </a:solidFill>
-                <a:latin typeface="Formular" panose="02000000000000000000" pitchFamily="2" charset="0"/>
-                <a:ea typeface="Public Sans"/>
-                <a:cs typeface="Public Sans"/>
-                <a:sym typeface="Public Sans"/>
-              </a:rPr>
-              <a:t>Alumno/a</a:t>
-            </a:r>
-            <a:r>
-              <a:rPr lang="es-419" sz="1800" dirty="0">
-                <a:solidFill>
-                  <a:schemeClr val="bg2"/>
-                </a:solidFill>
-                <a:latin typeface="Formular" panose="02000000000000000000" pitchFamily="2" charset="0"/>
-                <a:ea typeface="Public Sans"/>
-                <a:cs typeface="Public Sans"/>
-                <a:sym typeface="Public Sans"/>
-              </a:rPr>
-              <a:t> </a:t>
-            </a:r>
-            <a:endParaRPr lang="en-GB" sz="1800" dirty="0"/>
           </a:p>
         </p:txBody>
       </p:sp>

--- a/assets/template_utp_padres.pptx
+++ b/assets/template_utp_padres.pptx
@@ -6626,10 +6626,11 @@
   <p:cSld>
     <p:bg>
       <p:bgPr>
-        <a:blipFill>
+        <a:blipFill dpi="0" rotWithShape="1">
           <a:blip r:embed="rId3">
-            <a:alphaModFix/>
+            <a:lum/>
           </a:blip>
+          <a:srcRect/>
           <a:stretch>
             <a:fillRect/>
           </a:stretch>
@@ -6651,36 +6652,6 @@
           <a:chExt cx="0" cy="0"/>
         </a:xfrm>
       </p:grpSpPr>
-      <p:pic>
-        <p:nvPicPr>
-          <p:cNvPr id="4" name="Picture 3">
-            <a:extLst>
-              <a:ext uri="{FF2B5EF4-FFF2-40B4-BE49-F238E27FC236}">
-                <a16:creationId xmlns:a16="http://schemas.microsoft.com/office/drawing/2014/main" id="{1D1513A7-6D62-289B-CE99-FAF228458268}"/>
-              </a:ext>
-            </a:extLst>
-          </p:cNvPr>
-          <p:cNvPicPr>
-            <a:picLocks noChangeAspect="1"/>
-          </p:cNvPicPr>
-          <p:nvPr/>
-        </p:nvPicPr>
-        <p:blipFill>
-          <a:blip r:embed="rId4"/>
-          <a:stretch>
-            <a:fillRect/>
-          </a:stretch>
-        </p:blipFill>
-        <p:spPr>
-          <a:xfrm>
-            <a:off x="0" y="0"/>
-            <a:ext cx="10287000" cy="18288000"/>
-          </a:xfrm>
-          <a:prstGeom prst="rect">
-            <a:avLst/>
-          </a:prstGeom>
-        </p:spPr>
-      </p:pic>
       <p:sp>
         <p:nvSpPr>
           <p:cNvPr id="54" name="Google Shape;54;p13"/>
